--- a/generated/Tier 1 Broker Scorecards/PillarIA LLC_Broker_Scorecard.pptx
+++ b/generated/Tier 1 Broker Scorecards/PillarIA LLC_Broker_Scorecard.pptx
@@ -3394,7 +3394,7 @@
                         <a:rPr sz="900">
                           <a:latin typeface="Segoe UI"/>
                         </a:rPr>
-                        <a:t>Tier 1  |  12.16% / 15.00%</a:t>
+                        <a:t>Tier 1  |  12.00% / 15.00%</a:t>
                       </a:r>
                     </a:p>
                   </a:txBody>
@@ -3766,7 +3766,7 @@
                         <a:rPr sz="900">
                           <a:latin typeface="Segoe UI"/>
                         </a:rPr>
-                        <a:t>Non-Fleet Subs: 66  |  Binds: 9</a:t>
+                        <a:t>Non-Fleet Subs: 67  |  Binds: 9</a:t>
                       </a:r>
                     </a:p>
                   </a:txBody>
@@ -4428,7 +4428,7 @@
                           </a:solidFill>
                           <a:latin typeface="Segoe UI"/>
                         </a:rPr>
-                        <a:t>8</a:t>
+                        <a:t>9</a:t>
                       </a:r>
                     </a:p>
                   </a:txBody>
@@ -4707,7 +4707,7 @@
                           </a:solidFill>
                           <a:latin typeface="Segoe UI"/>
                         </a:rPr>
-                        <a:t>12.5%</a:t>
+                        <a:t>11.1%</a:t>
                       </a:r>
                     </a:p>
                   </a:txBody>

--- a/generated/Tier 1 Broker Scorecards/PillarIA LLC_Broker_Scorecard.pptx
+++ b/generated/Tier 1 Broker Scorecards/PillarIA LLC_Broker_Scorecard.pptx
@@ -3394,7 +3394,7 @@
                         <a:rPr sz="900">
                           <a:latin typeface="Segoe UI"/>
                         </a:rPr>
-                        <a:t>Tier 1  |  12.00% / 15.00%</a:t>
+                        <a:t>Tier 1  |  9.21% / 15.00%</a:t>
                       </a:r>
                     </a:p>
                   </a:txBody>
@@ -3766,7 +3766,7 @@
                         <a:rPr sz="900">
                           <a:latin typeface="Segoe UI"/>
                         </a:rPr>
-                        <a:t>Non-Fleet Subs: 67  |  Binds: 9</a:t>
+                        <a:t>Non-Fleet Subs: 68  |  Binds: 7</a:t>
                       </a:r>
                     </a:p>
                   </a:txBody>
@@ -4428,7 +4428,7 @@
                           </a:solidFill>
                           <a:latin typeface="Segoe UI"/>
                         </a:rPr>
-                        <a:t>9</a:t>
+                        <a:t>10</a:t>
                       </a:r>
                     </a:p>
                   </a:txBody>
@@ -4702,12 +4702,9 @@
                       <a:pPr algn="ctr"/>
                       <a:r>
                         <a:rPr sz="800">
-                          <a:solidFill>
-                            <a:srgbClr val="DC2626"/>
-                          </a:solidFill>
                           <a:latin typeface="Segoe UI"/>
                         </a:rPr>
-                        <a:t>11.1%</a:t>
+                        <a:t/>
                       </a:r>
                     </a:p>
                   </a:txBody>
@@ -4978,12 +4975,9 @@
                       <a:pPr algn="ctr"/>
                       <a:r>
                         <a:rPr sz="800">
-                          <a:solidFill>
-                            <a:srgbClr val="DC2626"/>
-                          </a:solidFill>
                           <a:latin typeface="Segoe UI"/>
                         </a:rPr>
-                        <a:t>1</a:t>
+                        <a:t/>
                       </a:r>
                     </a:p>
                   </a:txBody>

--- a/generated/Tier 1 Broker Scorecards/PillarIA LLC_Broker_Scorecard.pptx
+++ b/generated/Tier 1 Broker Scorecards/PillarIA LLC_Broker_Scorecard.pptx
@@ -3394,7 +3394,7 @@
                         <a:rPr sz="900">
                           <a:latin typeface="Segoe UI"/>
                         </a:rPr>
-                        <a:t>Tier 1  |  9.21% / 15.00%</a:t>
+                        <a:t>Tier 1  |  10.53% / 15.00%</a:t>
                       </a:r>
                     </a:p>
                   </a:txBody>
@@ -3766,7 +3766,7 @@
                         <a:rPr sz="900">
                           <a:latin typeface="Segoe UI"/>
                         </a:rPr>
-                        <a:t>Non-Fleet Subs: 68  |  Binds: 7</a:t>
+                        <a:t>Non-Fleet Subs: 68  |  Binds: 8</a:t>
                       </a:r>
                     </a:p>
                   </a:txBody>

--- a/generated/Tier 1 Broker Scorecards/PillarIA LLC_Broker_Scorecard.pptx
+++ b/generated/Tier 1 Broker Scorecards/PillarIA LLC_Broker_Scorecard.pptx
@@ -3394,7 +3394,7 @@
                         <a:rPr sz="900">
                           <a:latin typeface="Segoe UI"/>
                         </a:rPr>
-                        <a:t>Tier 1  |  10.53% / 15.00%</a:t>
+                        <a:t>Tier 1  |  11.84% / 15.00%</a:t>
                       </a:r>
                     </a:p>
                   </a:txBody>
@@ -3766,7 +3766,7 @@
                         <a:rPr sz="900">
                           <a:latin typeface="Segoe UI"/>
                         </a:rPr>
-                        <a:t>Non-Fleet Subs: 68  |  Binds: 8</a:t>
+                        <a:t>Non-Fleet Subs: 68  |  Binds: 9</a:t>
                       </a:r>
                     </a:p>
                   </a:txBody>
@@ -4624,7 +4624,7 @@
                           </a:solidFill>
                           <a:latin typeface="Segoe UI"/>
                         </a:rPr>
-                        <a:t>13.6%</a:t>
+                        <a:t>18.2%</a:t>
                       </a:r>
                     </a:p>
                   </a:txBody>
@@ -4903,7 +4903,7 @@
                           </a:solidFill>
                           <a:latin typeface="Segoe UI"/>
                         </a:rPr>
-                        <a:t>3</a:t>
+                        <a:t>4</a:t>
                       </a:r>
                     </a:p>
                   </a:txBody>

--- a/generated/Tier 1 Broker Scorecards/PillarIA LLC_Broker_Scorecard.pptx
+++ b/generated/Tier 1 Broker Scorecards/PillarIA LLC_Broker_Scorecard.pptx
@@ -3394,7 +3394,7 @@
                         <a:rPr sz="900">
                           <a:latin typeface="Segoe UI"/>
                         </a:rPr>
-                        <a:t>Tier 1  |  11.84% / 15.00%</a:t>
+                        <a:t>Tier 1  |  9.21% / 15.00%</a:t>
                       </a:r>
                     </a:p>
                   </a:txBody>
@@ -3766,7 +3766,7 @@
                         <a:rPr sz="900">
                           <a:latin typeface="Segoe UI"/>
                         </a:rPr>
-                        <a:t>Non-Fleet Subs: 68  |  Binds: 9</a:t>
+                        <a:t>Non-Fleet Subs: 68  |  Binds: 7</a:t>
                       </a:r>
                     </a:p>
                   </a:txBody>
@@ -4428,7 +4428,7 @@
                           </a:solidFill>
                           <a:latin typeface="Segoe UI"/>
                         </a:rPr>
-                        <a:t>10</a:t>
+                        <a:t>11</a:t>
                       </a:r>
                     </a:p>
                   </a:txBody>
@@ -4624,7 +4624,7 @@
                           </a:solidFill>
                           <a:latin typeface="Segoe UI"/>
                         </a:rPr>
-                        <a:t>18.2%</a:t>
+                        <a:t>13.6%</a:t>
                       </a:r>
                     </a:p>
                   </a:txBody>
@@ -4903,7 +4903,7 @@
                           </a:solidFill>
                           <a:latin typeface="Segoe UI"/>
                         </a:rPr>
-                        <a:t>4</a:t>
+                        <a:t>3</a:t>
                       </a:r>
                     </a:p>
                   </a:txBody>

--- a/generated/Tier 1 Broker Scorecards/PillarIA LLC_Broker_Scorecard.pptx
+++ b/generated/Tier 1 Broker Scorecards/PillarIA LLC_Broker_Scorecard.pptx
@@ -3357,7 +3357,7 @@
                         <a:rPr sz="800">
                           <a:latin typeface="Segoe UI"/>
                         </a:rPr>
-                        <a:t>$896,935.25 / $1,000,978.53 / $366,871.95</a:t>
+                        <a:t>$896,935.25 / $998,129.41 / $366,871.95</a:t>
                       </a:r>
                     </a:p>
                   </a:txBody>
@@ -3394,7 +3394,7 @@
                         <a:rPr sz="900">
                           <a:latin typeface="Segoe UI"/>
                         </a:rPr>
-                        <a:t>Tier 1  |  9.21% / 15.00%</a:t>
+                        <a:t>Tier 1  |  10.53% / 15.00%</a:t>
                       </a:r>
                     </a:p>
                   </a:txBody>
@@ -3766,7 +3766,7 @@
                         <a:rPr sz="900">
                           <a:latin typeface="Segoe UI"/>
                         </a:rPr>
-                        <a:t>Non-Fleet Subs: 68  |  Binds: 7</a:t>
+                        <a:t>Non-Fleet Subs: 68  |  Binds: 8</a:t>
                       </a:r>
                     </a:p>
                   </a:txBody>
@@ -4428,7 +4428,7 @@
                           </a:solidFill>
                           <a:latin typeface="Segoe UI"/>
                         </a:rPr>
-                        <a:t>11</a:t>
+                        <a:t>12</a:t>
                       </a:r>
                     </a:p>
                   </a:txBody>
@@ -4702,9 +4702,12 @@
                       <a:pPr algn="ctr"/>
                       <a:r>
                         <a:rPr sz="800">
+                          <a:solidFill>
+                            <a:srgbClr val="DC2626"/>
+                          </a:solidFill>
                           <a:latin typeface="Segoe UI"/>
                         </a:rPr>
-                        <a:t/>
+                        <a:t>8.3%</a:t>
                       </a:r>
                     </a:p>
                   </a:txBody>
@@ -4975,9 +4978,12 @@
                       <a:pPr algn="ctr"/>
                       <a:r>
                         <a:rPr sz="800">
+                          <a:solidFill>
+                            <a:srgbClr val="DC2626"/>
+                          </a:solidFill>
                           <a:latin typeface="Segoe UI"/>
                         </a:rPr>
-                        <a:t/>
+                        <a:t>1</a:t>
                       </a:r>
                     </a:p>
                   </a:txBody>
